--- a/Topici Speciale in BDTS/Topici Speciale în BDTS.pptx
+++ b/Topici Speciale in BDTS/Topici Speciale în BDTS.pptx
@@ -5,10 +5,10 @@
     <p:sldMasterId id="2147483660" r:id="rId4"/>
   </p:sldMasterIdLst>
   <p:notesMasterIdLst>
-    <p:notesMasterId r:id="rId17"/>
+    <p:notesMasterId r:id="rId22"/>
   </p:notesMasterIdLst>
   <p:handoutMasterIdLst>
-    <p:handoutMasterId r:id="rId18"/>
+    <p:handoutMasterId r:id="rId23"/>
   </p:handoutMasterIdLst>
   <p:sldIdLst>
     <p:sldId id="257" r:id="rId5"/>
@@ -23,6 +23,11 @@
     <p:sldId id="279" r:id="rId14"/>
     <p:sldId id="280" r:id="rId15"/>
     <p:sldId id="282" r:id="rId16"/>
+    <p:sldId id="283" r:id="rId17"/>
+    <p:sldId id="284" r:id="rId18"/>
+    <p:sldId id="285" r:id="rId19"/>
+    <p:sldId id="286" r:id="rId20"/>
+    <p:sldId id="287" r:id="rId21"/>
   </p:sldIdLst>
   <p:sldSz cx="12188825" cy="6858000"/>
   <p:notesSz cx="6858000" cy="9144000"/>
@@ -236,7 +241,7 @@
           <a:p>
             <a:fld id="{FE5B4EDC-59C0-49C7-8ADA-5A781B329E02}" type="datetimeFigureOut">
               <a:rPr lang="en-US"/>
-              <a:t>4/22/2026</a:t>
+              <a:t>4/23/2026</a:t>
             </a:fld>
             <a:endParaRPr/>
           </a:p>
@@ -401,7 +406,7 @@
           <a:p>
             <a:fld id="{F2D8D46A-B586-417D-BFBD-8C8FE0AAF762}" type="datetimeFigureOut">
               <a:rPr lang="en-US"/>
-              <a:t>4/22/2026</a:t>
+              <a:t>4/23/2026</a:t>
             </a:fld>
             <a:endParaRPr/>
           </a:p>
@@ -1419,7 +1424,7 @@
           <a:p>
             <a:fld id="{F0DFD029-FB74-4578-B929-F66AA97659CA}" type="datetimeFigureOut">
               <a:rPr lang="en-US"/>
-              <a:t>4/22/2026</a:t>
+              <a:t>4/23/2026</a:t>
             </a:fld>
             <a:endParaRPr/>
           </a:p>
@@ -1617,7 +1622,7 @@
           <a:p>
             <a:fld id="{F0DFD029-FB74-4578-B929-F66AA97659CA}" type="datetimeFigureOut">
               <a:rPr lang="en-US"/>
-              <a:t>4/22/2026</a:t>
+              <a:t>4/23/2026</a:t>
             </a:fld>
             <a:endParaRPr/>
           </a:p>
@@ -1825,7 +1830,7 @@
           <a:p>
             <a:fld id="{F0DFD029-FB74-4578-B929-F66AA97659CA}" type="datetimeFigureOut">
               <a:rPr lang="en-US"/>
-              <a:t>4/22/2026</a:t>
+              <a:t>4/23/2026</a:t>
             </a:fld>
             <a:endParaRPr/>
           </a:p>
@@ -2023,7 +2028,7 @@
           <a:p>
             <a:fld id="{F0DFD029-FB74-4578-B929-F66AA97659CA}" type="datetimeFigureOut">
               <a:rPr lang="en-US"/>
-              <a:t>4/22/2026</a:t>
+              <a:t>4/23/2026</a:t>
             </a:fld>
             <a:endParaRPr/>
           </a:p>
@@ -2455,7 +2460,7 @@
           <a:p>
             <a:fld id="{F0DFD029-FB74-4578-B929-F66AA97659CA}" type="datetimeFigureOut">
               <a:rPr lang="en-US"/>
-              <a:t>4/22/2026</a:t>
+              <a:t>4/23/2026</a:t>
             </a:fld>
             <a:endParaRPr/>
           </a:p>
@@ -2759,7 +2764,7 @@
           <a:p>
             <a:fld id="{F0DFD029-FB74-4578-B929-F66AA97659CA}" type="datetimeFigureOut">
               <a:rPr lang="en-US"/>
-              <a:t>4/22/2026</a:t>
+              <a:t>4/23/2026</a:t>
             </a:fld>
             <a:endParaRPr/>
           </a:p>
@@ -3215,7 +3220,7 @@
           <a:p>
             <a:fld id="{F0DFD029-FB74-4578-B929-F66AA97659CA}" type="datetimeFigureOut">
               <a:rPr lang="en-US"/>
-              <a:t>4/22/2026</a:t>
+              <a:t>4/23/2026</a:t>
             </a:fld>
             <a:endParaRPr/>
           </a:p>
@@ -3345,7 +3350,7 @@
           <a:p>
             <a:fld id="{F0DFD029-FB74-4578-B929-F66AA97659CA}" type="datetimeFigureOut">
               <a:rPr lang="en-US"/>
-              <a:t>4/22/2026</a:t>
+              <a:t>4/23/2026</a:t>
             </a:fld>
             <a:endParaRPr/>
           </a:p>
@@ -3452,7 +3457,7 @@
           <a:p>
             <a:fld id="{F0DFD029-FB74-4578-B929-F66AA97659CA}" type="datetimeFigureOut">
               <a:rPr lang="en-US"/>
-              <a:t>4/22/2026</a:t>
+              <a:t>4/23/2026</a:t>
             </a:fld>
             <a:endParaRPr/>
           </a:p>
@@ -3751,7 +3756,7 @@
           <a:p>
             <a:fld id="{F0DFD029-FB74-4578-B929-F66AA97659CA}" type="datetimeFigureOut">
               <a:rPr lang="en-US"/>
-              <a:t>4/22/2026</a:t>
+              <a:t>4/23/2026</a:t>
             </a:fld>
             <a:endParaRPr/>
           </a:p>
@@ -4039,7 +4044,7 @@
           <a:p>
             <a:fld id="{F0DFD029-FB74-4578-B929-F66AA97659CA}" type="datetimeFigureOut">
               <a:rPr lang="en-US"/>
-              <a:t>4/22/2026</a:t>
+              <a:t>4/23/2026</a:t>
             </a:fld>
             <a:endParaRPr/>
           </a:p>
@@ -4662,7 +4667,7 @@
             <a:fld id="{F0DFD029-FB74-4578-B929-F66AA97659CA}" type="datetimeFigureOut">
               <a:rPr lang="en-US"/>
               <a:pPr/>
-              <a:t>4/22/2026</a:t>
+              <a:t>4/23/2026</a:t>
             </a:fld>
             <a:endParaRPr/>
           </a:p>
@@ -7254,6 +7259,2073 @@
 </p:sld>
 </file>
 
+<file path=ppt/slides/slide13.xml><?xml version="1.0" encoding="utf-8"?>
+<p:sld xmlns:a="http://schemas.openxmlformats.org/drawingml/2006/main" xmlns:r="http://schemas.openxmlformats.org/officeDocument/2006/relationships" xmlns:p="http://schemas.openxmlformats.org/presentationml/2006/main">
+  <p:cSld>
+    <p:spTree>
+      <p:nvGrpSpPr>
+        <p:cNvPr id="1" name=""/>
+        <p:cNvGrpSpPr/>
+        <p:nvPr/>
+      </p:nvGrpSpPr>
+      <p:grpSpPr>
+        <a:xfrm>
+          <a:off x="0" y="0"/>
+          <a:ext cx="0" cy="0"/>
+          <a:chOff x="0" y="0"/>
+          <a:chExt cx="0" cy="0"/>
+        </a:xfrm>
+      </p:grpSpPr>
+      <p:sp>
+        <p:nvSpPr>
+          <p:cNvPr id="2" name="Title 1">
+            <a:extLst>
+              <a:ext uri="{FF2B5EF4-FFF2-40B4-BE49-F238E27FC236}">
+                <a16:creationId xmlns:a16="http://schemas.microsoft.com/office/drawing/2014/main" id="{BC80E28C-D504-4A22-8C80-E94451DAE969}"/>
+              </a:ext>
+            </a:extLst>
+          </p:cNvPr>
+          <p:cNvSpPr>
+            <a:spLocks noGrp="1"/>
+          </p:cNvSpPr>
+          <p:nvPr>
+            <p:ph type="title"/>
+          </p:nvPr>
+        </p:nvSpPr>
+        <p:spPr/>
+        <p:txBody>
+          <a:bodyPr/>
+          <a:lstStyle/>
+          <a:p>
+            <a:r>
+              <a:rPr lang="en-US" dirty="0"/>
+              <a:t>Mutation Testing</a:t>
+            </a:r>
+          </a:p>
+        </p:txBody>
+      </p:sp>
+      <p:sp>
+        <p:nvSpPr>
+          <p:cNvPr id="3" name="Content Placeholder 2">
+            <a:extLst>
+              <a:ext uri="{FF2B5EF4-FFF2-40B4-BE49-F238E27FC236}">
+                <a16:creationId xmlns:a16="http://schemas.microsoft.com/office/drawing/2014/main" id="{48B3ED6B-70CB-414D-88FF-4F1FFE58F625}"/>
+              </a:ext>
+            </a:extLst>
+          </p:cNvPr>
+          <p:cNvSpPr>
+            <a:spLocks noGrp="1"/>
+          </p:cNvSpPr>
+          <p:nvPr>
+            <p:ph idx="1"/>
+          </p:nvPr>
+        </p:nvSpPr>
+        <p:spPr/>
+        <p:txBody>
+          <a:bodyPr>
+            <a:normAutofit lnSpcReduction="10000"/>
+          </a:bodyPr>
+          <a:lstStyle/>
+          <a:p>
+            <a:r>
+              <a:rPr lang="en-US" dirty="0" err="1"/>
+              <a:t>Mutanții</a:t>
+            </a:r>
+            <a:r>
+              <a:rPr lang="en-US" dirty="0"/>
+              <a:t> au </a:t>
+            </a:r>
+            <a:r>
+              <a:rPr lang="en-US" dirty="0" err="1"/>
+              <a:t>fost</a:t>
+            </a:r>
+            <a:r>
+              <a:rPr lang="en-US" dirty="0"/>
+              <a:t> </a:t>
+            </a:r>
+            <a:r>
+              <a:rPr lang="en-US" dirty="0" err="1"/>
+              <a:t>crea</a:t>
+            </a:r>
+            <a:r>
+              <a:rPr lang="ro-RO" dirty="0"/>
+              <a:t>ți</a:t>
+            </a:r>
+            <a:r>
+              <a:rPr lang="en-US" dirty="0"/>
+              <a:t> pe </a:t>
+            </a:r>
+            <a:r>
+              <a:rPr lang="en-US" dirty="0" err="1"/>
+              <a:t>baza</a:t>
+            </a:r>
+            <a:r>
+              <a:rPr lang="en-US" dirty="0"/>
+              <a:t> </a:t>
+            </a:r>
+            <a:r>
+              <a:rPr lang="en-US" dirty="0" err="1"/>
+              <a:t>metodei</a:t>
+            </a:r>
+            <a:r>
+              <a:rPr lang="en-US" dirty="0"/>
+              <a:t> </a:t>
+            </a:r>
+            <a:r>
+              <a:rPr lang="en-US" dirty="0" err="1"/>
+              <a:t>evaluateStudent</a:t>
+            </a:r>
+            <a:r>
+              <a:rPr lang="en-US" dirty="0"/>
+              <a:t> din </a:t>
+            </a:r>
+            <a:r>
+              <a:rPr lang="en-US" dirty="0" err="1"/>
+              <a:t>clasa</a:t>
+            </a:r>
+            <a:r>
+              <a:rPr lang="en-US" dirty="0"/>
+              <a:t> </a:t>
+            </a:r>
+            <a:r>
+              <a:rPr lang="en-US" dirty="0" err="1"/>
+              <a:t>GradeCheck</a:t>
+            </a:r>
+            <a:r>
+              <a:rPr lang="en-US" dirty="0"/>
+              <a:t>.</a:t>
+            </a:r>
+          </a:p>
+          <a:p>
+            <a:r>
+              <a:rPr lang="en-US" dirty="0" err="1"/>
+              <a:t>Toate</a:t>
+            </a:r>
+            <a:r>
+              <a:rPr lang="en-US" dirty="0"/>
+              <a:t> </a:t>
+            </a:r>
+            <a:r>
+              <a:rPr lang="en-US" dirty="0" err="1"/>
+              <a:t>modificările</a:t>
+            </a:r>
+            <a:r>
+              <a:rPr lang="en-US" dirty="0"/>
+              <a:t> au </a:t>
+            </a:r>
+            <a:r>
+              <a:rPr lang="en-US" dirty="0" err="1"/>
+              <a:t>fost</a:t>
+            </a:r>
+            <a:r>
+              <a:rPr lang="en-US" dirty="0"/>
+              <a:t> </a:t>
+            </a:r>
+            <a:r>
+              <a:rPr lang="en-US" dirty="0" err="1"/>
+              <a:t>realizate</a:t>
+            </a:r>
+            <a:r>
+              <a:rPr lang="en-US" dirty="0"/>
+              <a:t> </a:t>
+            </a:r>
+            <a:r>
+              <a:rPr lang="en-US" dirty="0" err="1"/>
+              <a:t>asupra</a:t>
+            </a:r>
+            <a:r>
+              <a:rPr lang="en-US" dirty="0"/>
+              <a:t> </a:t>
+            </a:r>
+            <a:r>
+              <a:rPr lang="en-US" dirty="0" err="1"/>
+              <a:t>condiției</a:t>
+            </a:r>
+            <a:r>
+              <a:rPr lang="en-US" dirty="0"/>
+              <a:t> care </a:t>
+            </a:r>
+            <a:r>
+              <a:rPr lang="en-US" dirty="0" err="1"/>
+              <a:t>determină</a:t>
+            </a:r>
+            <a:r>
+              <a:rPr lang="en-US" dirty="0"/>
+              <a:t> </a:t>
+            </a:r>
+            <a:r>
+              <a:rPr lang="en-US" dirty="0" err="1"/>
+              <a:t>rezultatul</a:t>
+            </a:r>
+            <a:r>
+              <a:rPr lang="en-US" dirty="0"/>
+              <a:t> "PICAT".</a:t>
+            </a:r>
+            <a:endParaRPr lang="ro-RO" dirty="0"/>
+          </a:p>
+          <a:p>
+            <a:r>
+              <a:rPr lang="en-US" dirty="0"/>
+              <a:t>Au </a:t>
+            </a:r>
+            <a:r>
+              <a:rPr lang="en-US" dirty="0" err="1"/>
+              <a:t>fost</a:t>
+            </a:r>
+            <a:r>
+              <a:rPr lang="en-US" dirty="0"/>
+              <a:t> </a:t>
+            </a:r>
+            <a:r>
+              <a:rPr lang="en-US" dirty="0" err="1"/>
+              <a:t>analizați</a:t>
+            </a:r>
+            <a:r>
+              <a:rPr lang="en-US" dirty="0"/>
+              <a:t> </a:t>
+            </a:r>
+            <a:r>
+              <a:rPr lang="en-US" dirty="0" err="1"/>
+              <a:t>trei</a:t>
+            </a:r>
+            <a:r>
+              <a:rPr lang="en-US" dirty="0"/>
+              <a:t> </a:t>
+            </a:r>
+            <a:r>
+              <a:rPr lang="en-US" dirty="0" err="1"/>
+              <a:t>tipuri</a:t>
+            </a:r>
+            <a:r>
+              <a:rPr lang="en-US" dirty="0"/>
+              <a:t> de </a:t>
+            </a:r>
+            <a:r>
+              <a:rPr lang="en-US" dirty="0" err="1"/>
+              <a:t>mutanți</a:t>
+            </a:r>
+            <a:r>
+              <a:rPr lang="en-US" dirty="0"/>
+              <a:t>:</a:t>
+            </a:r>
+            <a:br>
+              <a:rPr lang="en-US" dirty="0"/>
+            </a:br>
+            <a:r>
+              <a:rPr lang="en-US" dirty="0"/>
+              <a:t>- KILLED (</a:t>
+            </a:r>
+            <a:r>
+              <a:rPr lang="en-US" dirty="0" err="1"/>
+              <a:t>detectați</a:t>
+            </a:r>
+            <a:r>
+              <a:rPr lang="en-US" dirty="0"/>
+              <a:t> de teste)</a:t>
+            </a:r>
+            <a:br>
+              <a:rPr lang="en-US" dirty="0"/>
+            </a:br>
+            <a:r>
+              <a:rPr lang="en-US" dirty="0"/>
+              <a:t>- </a:t>
+            </a:r>
+            <a:r>
+              <a:rPr lang="ro-RO" dirty="0"/>
+              <a:t>SURVIVED </a:t>
+            </a:r>
+            <a:r>
+              <a:rPr lang="en-US" dirty="0"/>
+              <a:t>(</a:t>
+            </a:r>
+            <a:r>
+              <a:rPr lang="en-US" dirty="0" err="1"/>
+              <a:t>nedetectați</a:t>
+            </a:r>
+            <a:r>
+              <a:rPr lang="en-US" dirty="0"/>
+              <a:t>)</a:t>
+            </a:r>
+            <a:br>
+              <a:rPr lang="en-US" dirty="0"/>
+            </a:br>
+            <a:r>
+              <a:rPr lang="en-US" dirty="0"/>
+              <a:t>- EQUIVALENT (</a:t>
+            </a:r>
+            <a:r>
+              <a:rPr lang="en-US" dirty="0" err="1"/>
+              <a:t>comportament</a:t>
+            </a:r>
+            <a:r>
+              <a:rPr lang="en-US" dirty="0"/>
+              <a:t> identic)</a:t>
+            </a:r>
+            <a:endParaRPr lang="ro-RO" dirty="0"/>
+          </a:p>
+          <a:p>
+            <a:r>
+              <a:rPr lang="en-US" dirty="0" err="1"/>
+              <a:t>Scopul</a:t>
+            </a:r>
+            <a:r>
+              <a:rPr lang="en-US" dirty="0"/>
+              <a:t> a </a:t>
+            </a:r>
+            <a:r>
+              <a:rPr lang="en-US" dirty="0" err="1"/>
+              <a:t>fost</a:t>
+            </a:r>
+            <a:r>
+              <a:rPr lang="en-US" dirty="0"/>
+              <a:t> </a:t>
+            </a:r>
+            <a:r>
+              <a:rPr lang="en-US" dirty="0" err="1"/>
+              <a:t>evaluarea</a:t>
+            </a:r>
+            <a:r>
+              <a:rPr lang="en-US" dirty="0"/>
+              <a:t> </a:t>
+            </a:r>
+            <a:r>
+              <a:rPr lang="en-US" dirty="0" err="1"/>
+              <a:t>eficienței</a:t>
+            </a:r>
+            <a:r>
+              <a:rPr lang="en-US" dirty="0"/>
+              <a:t> </a:t>
+            </a:r>
+            <a:r>
+              <a:rPr lang="en-US" dirty="0" err="1"/>
+              <a:t>setului</a:t>
+            </a:r>
+            <a:r>
+              <a:rPr lang="en-US" dirty="0"/>
+              <a:t> de teste</a:t>
+            </a:r>
+            <a:r>
+              <a:rPr lang="ro-RO" dirty="0"/>
+              <a:t> </a:t>
+            </a:r>
+            <a:r>
+              <a:rPr lang="en-US" dirty="0" err="1"/>
+              <a:t>și</a:t>
+            </a:r>
+            <a:r>
+              <a:rPr lang="en-US" dirty="0"/>
+              <a:t> </a:t>
+            </a:r>
+            <a:r>
+              <a:rPr lang="en-US" dirty="0" err="1"/>
+              <a:t>identificarea</a:t>
+            </a:r>
+            <a:r>
+              <a:rPr lang="en-US" dirty="0"/>
+              <a:t> </a:t>
+            </a:r>
+            <a:r>
+              <a:rPr lang="en-US" dirty="0" err="1"/>
+              <a:t>eventualelor</a:t>
+            </a:r>
+            <a:r>
+              <a:rPr lang="en-US" dirty="0"/>
+              <a:t> </a:t>
+            </a:r>
+            <a:r>
+              <a:rPr lang="en-US" dirty="0" err="1"/>
+              <a:t>puncte</a:t>
+            </a:r>
+            <a:r>
+              <a:rPr lang="en-US" dirty="0"/>
+              <a:t> </a:t>
+            </a:r>
+            <a:r>
+              <a:rPr lang="en-US" dirty="0" err="1"/>
+              <a:t>slabe</a:t>
+            </a:r>
+            <a:r>
+              <a:rPr lang="en-US" dirty="0"/>
+              <a:t>.</a:t>
+            </a:r>
+          </a:p>
+        </p:txBody>
+      </p:sp>
+    </p:spTree>
+    <p:extLst>
+      <p:ext uri="{BB962C8B-B14F-4D97-AF65-F5344CB8AC3E}">
+        <p14:creationId xmlns:p14="http://schemas.microsoft.com/office/powerpoint/2010/main" val="234793164"/>
+      </p:ext>
+    </p:extLst>
+  </p:cSld>
+  <p:clrMapOvr>
+    <a:masterClrMapping/>
+  </p:clrMapOvr>
+  <mc:AlternateContent xmlns:mc="http://schemas.openxmlformats.org/markup-compatibility/2006" xmlns:p14="http://schemas.microsoft.com/office/powerpoint/2010/main">
+    <mc:Choice Requires="p14">
+      <p:transition spd="med" p14:dur="700">
+        <p:fade/>
+      </p:transition>
+    </mc:Choice>
+    <mc:Fallback xmlns="">
+      <p:transition spd="med">
+        <p:fade/>
+      </p:transition>
+    </mc:Fallback>
+  </mc:AlternateContent>
+</p:sld>
+</file>
+
+<file path=ppt/slides/slide14.xml><?xml version="1.0" encoding="utf-8"?>
+<p:sld xmlns:a="http://schemas.openxmlformats.org/drawingml/2006/main" xmlns:r="http://schemas.openxmlformats.org/officeDocument/2006/relationships" xmlns:p="http://schemas.openxmlformats.org/presentationml/2006/main">
+  <p:cSld>
+    <p:spTree>
+      <p:nvGrpSpPr>
+        <p:cNvPr id="1" name=""/>
+        <p:cNvGrpSpPr/>
+        <p:nvPr/>
+      </p:nvGrpSpPr>
+      <p:grpSpPr>
+        <a:xfrm>
+          <a:off x="0" y="0"/>
+          <a:ext cx="0" cy="0"/>
+          <a:chOff x="0" y="0"/>
+          <a:chExt cx="0" cy="0"/>
+        </a:xfrm>
+      </p:grpSpPr>
+      <p:sp>
+        <p:nvSpPr>
+          <p:cNvPr id="2" name="Title 1">
+            <a:extLst>
+              <a:ext uri="{FF2B5EF4-FFF2-40B4-BE49-F238E27FC236}">
+                <a16:creationId xmlns:a16="http://schemas.microsoft.com/office/drawing/2014/main" id="{6FB39475-A829-4B64-AF16-91699C33C979}"/>
+              </a:ext>
+            </a:extLst>
+          </p:cNvPr>
+          <p:cNvSpPr>
+            <a:spLocks noGrp="1"/>
+          </p:cNvSpPr>
+          <p:nvPr>
+            <p:ph type="title"/>
+          </p:nvPr>
+        </p:nvSpPr>
+        <p:spPr/>
+        <p:txBody>
+          <a:bodyPr/>
+          <a:lstStyle/>
+          <a:p>
+            <a:r>
+              <a:rPr lang="ro-RO" dirty="0" err="1"/>
+              <a:t>GradeCheckMutantKilled</a:t>
+            </a:r>
+            <a:endParaRPr lang="en-US" dirty="0"/>
+          </a:p>
+        </p:txBody>
+      </p:sp>
+      <p:sp>
+        <p:nvSpPr>
+          <p:cNvPr id="4" name="Content Placeholder 3">
+            <a:extLst>
+              <a:ext uri="{FF2B5EF4-FFF2-40B4-BE49-F238E27FC236}">
+                <a16:creationId xmlns:a16="http://schemas.microsoft.com/office/drawing/2014/main" id="{608A5CC3-8D86-4BDD-BD6E-21C9CD6FEB89}"/>
+              </a:ext>
+            </a:extLst>
+          </p:cNvPr>
+          <p:cNvSpPr>
+            <a:spLocks noGrp="1"/>
+          </p:cNvSpPr>
+          <p:nvPr>
+            <p:ph sz="half" idx="1"/>
+          </p:nvPr>
+        </p:nvSpPr>
+        <p:spPr>
+          <a:xfrm>
+            <a:off x="1447748" y="1706879"/>
+            <a:ext cx="4723128" cy="1223963"/>
+          </a:xfrm>
+        </p:spPr>
+        <p:txBody>
+          <a:bodyPr>
+            <a:normAutofit/>
+          </a:bodyPr>
+          <a:lstStyle/>
+          <a:p>
+            <a:pPr marL="0" indent="0">
+              <a:buNone/>
+            </a:pPr>
+            <a:r>
+              <a:rPr lang="en-US" sz="2000" dirty="0" err="1"/>
+              <a:t>Operatorul</a:t>
+            </a:r>
+            <a:r>
+              <a:rPr lang="en-US" sz="2000" dirty="0"/>
+              <a:t> logic a </a:t>
+            </a:r>
+            <a:r>
+              <a:rPr lang="en-US" sz="2000" dirty="0" err="1"/>
+              <a:t>fost</a:t>
+            </a:r>
+            <a:r>
+              <a:rPr lang="en-US" sz="2000" dirty="0"/>
+              <a:t> </a:t>
+            </a:r>
+            <a:r>
+              <a:rPr lang="en-US" sz="2000" dirty="0" err="1"/>
+              <a:t>modificat</a:t>
+            </a:r>
+            <a:r>
+              <a:rPr lang="en-US" sz="2000" dirty="0"/>
+              <a:t> din OR </a:t>
+            </a:r>
+            <a:r>
+              <a:rPr lang="en-US" sz="2000" dirty="0" err="1"/>
+              <a:t>în</a:t>
+            </a:r>
+            <a:r>
+              <a:rPr lang="en-US" sz="2000" dirty="0"/>
+              <a:t> AND:</a:t>
+            </a:r>
+            <a:br>
+              <a:rPr lang="en-US" sz="2000" dirty="0"/>
+            </a:br>
+            <a:r>
+              <a:rPr lang="en-US" sz="2000" dirty="0"/>
+              <a:t>(average &lt; 5 || attendance &lt; 50) → (average &lt; 5 &amp;&amp; attendance &lt; 50)</a:t>
+            </a:r>
+          </a:p>
+        </p:txBody>
+      </p:sp>
+      <p:pic>
+        <p:nvPicPr>
+          <p:cNvPr id="7" name="Content Placeholder 6">
+            <a:extLst>
+              <a:ext uri="{FF2B5EF4-FFF2-40B4-BE49-F238E27FC236}">
+                <a16:creationId xmlns:a16="http://schemas.microsoft.com/office/drawing/2014/main" id="{003D1ABD-5713-4017-BA52-E047629A330A}"/>
+              </a:ext>
+            </a:extLst>
+          </p:cNvPr>
+          <p:cNvPicPr>
+            <a:picLocks noGrp="1" noChangeAspect="1"/>
+          </p:cNvPicPr>
+          <p:nvPr>
+            <p:ph sz="half" idx="2"/>
+          </p:nvPr>
+        </p:nvPicPr>
+        <p:blipFill>
+          <a:blip r:embed="rId2"/>
+          <a:stretch>
+            <a:fillRect/>
+          </a:stretch>
+        </p:blipFill>
+        <p:spPr>
+          <a:xfrm>
+            <a:off x="1447748" y="3122190"/>
+            <a:ext cx="4646664" cy="2907991"/>
+          </a:xfrm>
+        </p:spPr>
+      </p:pic>
+      <p:pic>
+        <p:nvPicPr>
+          <p:cNvPr id="9" name="Picture 8">
+            <a:extLst>
+              <a:ext uri="{FF2B5EF4-FFF2-40B4-BE49-F238E27FC236}">
+                <a16:creationId xmlns:a16="http://schemas.microsoft.com/office/drawing/2014/main" id="{4F2A8F09-57DB-4FAE-BEA6-72352323754A}"/>
+              </a:ext>
+            </a:extLst>
+          </p:cNvPr>
+          <p:cNvPicPr>
+            <a:picLocks noChangeAspect="1"/>
+          </p:cNvPicPr>
+          <p:nvPr/>
+        </p:nvPicPr>
+        <p:blipFill>
+          <a:blip r:embed="rId3"/>
+          <a:stretch>
+            <a:fillRect/>
+          </a:stretch>
+        </p:blipFill>
+        <p:spPr>
+          <a:xfrm>
+            <a:off x="7168674" y="1842373"/>
+            <a:ext cx="4458476" cy="2176939"/>
+          </a:xfrm>
+          <a:prstGeom prst="rect">
+            <a:avLst/>
+          </a:prstGeom>
+        </p:spPr>
+      </p:pic>
+      <p:sp>
+        <p:nvSpPr>
+          <p:cNvPr id="14" name="TextBox 13">
+            <a:extLst>
+              <a:ext uri="{FF2B5EF4-FFF2-40B4-BE49-F238E27FC236}">
+                <a16:creationId xmlns:a16="http://schemas.microsoft.com/office/drawing/2014/main" id="{7D54C3B9-9286-4AFA-8E73-507D5801928E}"/>
+              </a:ext>
+            </a:extLst>
+          </p:cNvPr>
+          <p:cNvSpPr txBox="1"/>
+          <p:nvPr/>
+        </p:nvSpPr>
+        <p:spPr>
+          <a:xfrm>
+            <a:off x="7168674" y="4724400"/>
+            <a:ext cx="4353736" cy="707886"/>
+          </a:xfrm>
+          <a:prstGeom prst="rect">
+            <a:avLst/>
+          </a:prstGeom>
+          <a:noFill/>
+        </p:spPr>
+        <p:txBody>
+          <a:bodyPr wrap="square">
+            <a:spAutoFit/>
+          </a:bodyPr>
+          <a:lstStyle/>
+          <a:p>
+            <a:r>
+              <a:rPr lang="en-US" sz="2000" dirty="0" err="1"/>
+              <a:t>Rulând</a:t>
+            </a:r>
+            <a:r>
+              <a:rPr lang="en-US" sz="2000" dirty="0"/>
+              <a:t> </a:t>
+            </a:r>
+            <a:r>
+              <a:rPr lang="en-US" sz="2000" dirty="0" err="1"/>
+              <a:t>același</a:t>
+            </a:r>
+            <a:r>
+              <a:rPr lang="en-US" sz="2000" dirty="0"/>
+              <a:t> set de teste </a:t>
+            </a:r>
+            <a:r>
+              <a:rPr lang="en-US" sz="2000" dirty="0" err="1"/>
+              <a:t>observăm</a:t>
+            </a:r>
+            <a:r>
+              <a:rPr lang="en-US" sz="2000" dirty="0"/>
+              <a:t> </a:t>
+            </a:r>
+            <a:r>
+              <a:rPr lang="en-US" sz="2000" dirty="0" err="1"/>
+              <a:t>că</a:t>
+            </a:r>
+            <a:r>
+              <a:rPr lang="en-US" sz="2000" dirty="0"/>
+              <a:t> </a:t>
+            </a:r>
+            <a:r>
+              <a:rPr lang="en-US" sz="2000" dirty="0" err="1"/>
+              <a:t>mutantul</a:t>
+            </a:r>
+            <a:r>
+              <a:rPr lang="en-US" sz="2000" dirty="0"/>
+              <a:t> </a:t>
+            </a:r>
+            <a:r>
+              <a:rPr lang="en-US" sz="2000" dirty="0" err="1"/>
+              <a:t>este</a:t>
+            </a:r>
+            <a:r>
+              <a:rPr lang="en-US" sz="2000" dirty="0"/>
+              <a:t> </a:t>
+            </a:r>
+            <a:r>
+              <a:rPr lang="en-US" sz="2000" dirty="0" err="1"/>
+              <a:t>eliminat</a:t>
+            </a:r>
+            <a:r>
+              <a:rPr lang="en-US" sz="2000" dirty="0"/>
+              <a:t>. </a:t>
+            </a:r>
+          </a:p>
+        </p:txBody>
+      </p:sp>
+      <p:cxnSp>
+        <p:nvCxnSpPr>
+          <p:cNvPr id="15" name="Straight Connector 14">
+            <a:extLst>
+              <a:ext uri="{FF2B5EF4-FFF2-40B4-BE49-F238E27FC236}">
+                <a16:creationId xmlns:a16="http://schemas.microsoft.com/office/drawing/2014/main" id="{84B5E215-83CF-4696-8243-08D2F6BB2EF6}"/>
+              </a:ext>
+            </a:extLst>
+          </p:cNvPr>
+          <p:cNvCxnSpPr>
+            <a:cxnSpLocks/>
+          </p:cNvCxnSpPr>
+          <p:nvPr/>
+        </p:nvCxnSpPr>
+        <p:spPr>
+          <a:xfrm>
+            <a:off x="6704012" y="1643910"/>
+            <a:ext cx="0" cy="4223490"/>
+          </a:xfrm>
+          <a:prstGeom prst="line">
+            <a:avLst/>
+          </a:prstGeom>
+          <a:ln w="25400"/>
+        </p:spPr>
+        <p:style>
+          <a:lnRef idx="1">
+            <a:schemeClr val="accent1"/>
+          </a:lnRef>
+          <a:fillRef idx="0">
+            <a:schemeClr val="accent1"/>
+          </a:fillRef>
+          <a:effectRef idx="0">
+            <a:schemeClr val="accent1"/>
+          </a:effectRef>
+          <a:fontRef idx="minor">
+            <a:schemeClr val="tx1"/>
+          </a:fontRef>
+        </p:style>
+      </p:cxnSp>
+    </p:spTree>
+    <p:extLst>
+      <p:ext uri="{BB962C8B-B14F-4D97-AF65-F5344CB8AC3E}">
+        <p14:creationId xmlns:p14="http://schemas.microsoft.com/office/powerpoint/2010/main" val="3150052931"/>
+      </p:ext>
+    </p:extLst>
+  </p:cSld>
+  <p:clrMapOvr>
+    <a:masterClrMapping/>
+  </p:clrMapOvr>
+  <mc:AlternateContent xmlns:mc="http://schemas.openxmlformats.org/markup-compatibility/2006" xmlns:p14="http://schemas.microsoft.com/office/powerpoint/2010/main">
+    <mc:Choice Requires="p14">
+      <p:transition spd="med" p14:dur="700">
+        <p:fade/>
+      </p:transition>
+    </mc:Choice>
+    <mc:Fallback xmlns="">
+      <p:transition spd="med">
+        <p:fade/>
+      </p:transition>
+    </mc:Fallback>
+  </mc:AlternateContent>
+</p:sld>
+</file>
+
+<file path=ppt/slides/slide15.xml><?xml version="1.0" encoding="utf-8"?>
+<p:sld xmlns:a="http://schemas.openxmlformats.org/drawingml/2006/main" xmlns:r="http://schemas.openxmlformats.org/officeDocument/2006/relationships" xmlns:p="http://schemas.openxmlformats.org/presentationml/2006/main">
+  <p:cSld>
+    <p:spTree>
+      <p:nvGrpSpPr>
+        <p:cNvPr id="1" name=""/>
+        <p:cNvGrpSpPr/>
+        <p:nvPr/>
+      </p:nvGrpSpPr>
+      <p:grpSpPr>
+        <a:xfrm>
+          <a:off x="0" y="0"/>
+          <a:ext cx="0" cy="0"/>
+          <a:chOff x="0" y="0"/>
+          <a:chExt cx="0" cy="0"/>
+        </a:xfrm>
+      </p:grpSpPr>
+      <p:sp>
+        <p:nvSpPr>
+          <p:cNvPr id="2" name="Title 1">
+            <a:extLst>
+              <a:ext uri="{FF2B5EF4-FFF2-40B4-BE49-F238E27FC236}">
+                <a16:creationId xmlns:a16="http://schemas.microsoft.com/office/drawing/2014/main" id="{6FB39475-A829-4B64-AF16-91699C33C979}"/>
+              </a:ext>
+            </a:extLst>
+          </p:cNvPr>
+          <p:cNvSpPr>
+            <a:spLocks noGrp="1"/>
+          </p:cNvSpPr>
+          <p:nvPr>
+            <p:ph type="title"/>
+          </p:nvPr>
+        </p:nvSpPr>
+        <p:spPr/>
+        <p:txBody>
+          <a:bodyPr/>
+          <a:lstStyle/>
+          <a:p>
+            <a:r>
+              <a:rPr lang="ro-RO" dirty="0" err="1"/>
+              <a:t>GradeCheckMutantSurvived</a:t>
+            </a:r>
+            <a:endParaRPr lang="en-US" dirty="0"/>
+          </a:p>
+        </p:txBody>
+      </p:sp>
+      <p:sp>
+        <p:nvSpPr>
+          <p:cNvPr id="4" name="Content Placeholder 3">
+            <a:extLst>
+              <a:ext uri="{FF2B5EF4-FFF2-40B4-BE49-F238E27FC236}">
+                <a16:creationId xmlns:a16="http://schemas.microsoft.com/office/drawing/2014/main" id="{608A5CC3-8D86-4BDD-BD6E-21C9CD6FEB89}"/>
+              </a:ext>
+            </a:extLst>
+          </p:cNvPr>
+          <p:cNvSpPr>
+            <a:spLocks noGrp="1"/>
+          </p:cNvSpPr>
+          <p:nvPr>
+            <p:ph sz="half" idx="1"/>
+          </p:nvPr>
+        </p:nvSpPr>
+        <p:spPr>
+          <a:xfrm>
+            <a:off x="1454682" y="1643910"/>
+            <a:ext cx="5104127" cy="1223963"/>
+          </a:xfrm>
+        </p:spPr>
+        <p:txBody>
+          <a:bodyPr>
+            <a:normAutofit/>
+          </a:bodyPr>
+          <a:lstStyle/>
+          <a:p>
+            <a:pPr marL="0" indent="0">
+              <a:buNone/>
+            </a:pPr>
+            <a:r>
+              <a:rPr lang="en-US" sz="1400" dirty="0" err="1"/>
+              <a:t>Operatorul</a:t>
+            </a:r>
+            <a:r>
+              <a:rPr lang="en-US" sz="1400" dirty="0"/>
+              <a:t> logic a </a:t>
+            </a:r>
+            <a:r>
+              <a:rPr lang="en-US" sz="1400" dirty="0" err="1"/>
+              <a:t>fost</a:t>
+            </a:r>
+            <a:r>
+              <a:rPr lang="en-US" sz="1400" dirty="0"/>
+              <a:t> </a:t>
+            </a:r>
+            <a:r>
+              <a:rPr lang="en-US" sz="1400" dirty="0" err="1"/>
+              <a:t>modificat</a:t>
+            </a:r>
+            <a:r>
+              <a:rPr lang="en-US" sz="1400" dirty="0"/>
+              <a:t> </a:t>
+            </a:r>
+            <a:r>
+              <a:rPr lang="en-US" sz="1400" dirty="0" err="1"/>
+              <a:t>astfel</a:t>
+            </a:r>
+            <a:r>
+              <a:rPr lang="en-US" sz="1400" dirty="0"/>
+              <a:t>:</a:t>
+            </a:r>
+            <a:br>
+              <a:rPr lang="en-US" sz="1400" dirty="0"/>
+            </a:br>
+            <a:r>
+              <a:rPr lang="en-US" sz="1400" dirty="0"/>
+              <a:t>(attendance &lt; 50) → (attendance &lt; 51)</a:t>
+            </a:r>
+            <a:endParaRPr lang="ro-RO" sz="1400" dirty="0"/>
+          </a:p>
+          <a:p>
+            <a:pPr marL="0" indent="0">
+              <a:buNone/>
+            </a:pPr>
+            <a:r>
+              <a:rPr lang="ro-RO" sz="1400" dirty="0"/>
+              <a:t>Modificarea</a:t>
+            </a:r>
+            <a:r>
+              <a:rPr lang="en-US" sz="1400" dirty="0"/>
+              <a:t> </a:t>
+            </a:r>
+            <a:r>
+              <a:rPr lang="en-US" sz="1400" dirty="0" err="1"/>
+              <a:t>este</a:t>
+            </a:r>
+            <a:r>
+              <a:rPr lang="en-US" sz="1400" dirty="0"/>
+              <a:t> </a:t>
+            </a:r>
+            <a:r>
+              <a:rPr lang="en-US" sz="1400" dirty="0" err="1"/>
+              <a:t>minoră</a:t>
+            </a:r>
+            <a:r>
+              <a:rPr lang="en-US" sz="1400" dirty="0"/>
+              <a:t> </a:t>
+            </a:r>
+            <a:r>
+              <a:rPr lang="en-US" sz="1400" dirty="0" err="1"/>
+              <a:t>și</a:t>
+            </a:r>
+            <a:r>
+              <a:rPr lang="en-US" sz="1400" dirty="0"/>
+              <a:t> nu </a:t>
+            </a:r>
+            <a:r>
+              <a:rPr lang="en-US" sz="1400" dirty="0" err="1"/>
+              <a:t>afectează</a:t>
+            </a:r>
+            <a:r>
+              <a:rPr lang="en-US" sz="1400" dirty="0"/>
+              <a:t> </a:t>
+            </a:r>
+            <a:r>
+              <a:rPr lang="en-US" sz="1400" dirty="0" err="1"/>
+              <a:t>comportamentul</a:t>
+            </a:r>
+            <a:br>
+              <a:rPr lang="en-US" sz="1400" dirty="0"/>
+            </a:br>
+            <a:r>
+              <a:rPr lang="en-US" sz="1400" dirty="0" err="1"/>
+              <a:t>pentru</a:t>
+            </a:r>
+            <a:r>
+              <a:rPr lang="en-US" sz="1400" dirty="0"/>
+              <a:t> </a:t>
+            </a:r>
+            <a:r>
+              <a:rPr lang="en-US" sz="1400" dirty="0" err="1"/>
+              <a:t>valorile</a:t>
+            </a:r>
+            <a:r>
+              <a:rPr lang="en-US" sz="1400" dirty="0"/>
+              <a:t> testate</a:t>
+            </a:r>
+            <a:r>
+              <a:rPr lang="ro-RO" sz="1400" dirty="0"/>
+              <a:t> întrucât niciun test nu are </a:t>
+            </a:r>
+            <a:r>
+              <a:rPr lang="ro-RO" sz="1400" dirty="0" err="1"/>
+              <a:t>attendance</a:t>
+            </a:r>
+            <a:r>
+              <a:rPr lang="ro-RO" sz="1400" dirty="0"/>
+              <a:t> =</a:t>
+            </a:r>
+            <a:r>
+              <a:rPr lang="en-US" sz="1400" dirty="0"/>
+              <a:t>=</a:t>
+            </a:r>
+            <a:r>
+              <a:rPr lang="ro-RO" sz="1400" dirty="0"/>
+              <a:t> 50.</a:t>
+            </a:r>
+            <a:endParaRPr lang="en-US" sz="2000" dirty="0"/>
+          </a:p>
+        </p:txBody>
+      </p:sp>
+      <p:sp>
+        <p:nvSpPr>
+          <p:cNvPr id="14" name="TextBox 13">
+            <a:extLst>
+              <a:ext uri="{FF2B5EF4-FFF2-40B4-BE49-F238E27FC236}">
+                <a16:creationId xmlns:a16="http://schemas.microsoft.com/office/drawing/2014/main" id="{7D54C3B9-9286-4AFA-8E73-507D5801928E}"/>
+              </a:ext>
+            </a:extLst>
+          </p:cNvPr>
+          <p:cNvSpPr txBox="1"/>
+          <p:nvPr/>
+        </p:nvSpPr>
+        <p:spPr>
+          <a:xfrm>
+            <a:off x="7192485" y="4648200"/>
+            <a:ext cx="4540725" cy="584775"/>
+          </a:xfrm>
+          <a:prstGeom prst="rect">
+            <a:avLst/>
+          </a:prstGeom>
+          <a:noFill/>
+        </p:spPr>
+        <p:txBody>
+          <a:bodyPr wrap="square">
+            <a:spAutoFit/>
+          </a:bodyPr>
+          <a:lstStyle/>
+          <a:p>
+            <a:r>
+              <a:rPr lang="en-US" sz="1600" dirty="0" err="1"/>
+              <a:t>Rulând</a:t>
+            </a:r>
+            <a:r>
+              <a:rPr lang="en-US" sz="1600" dirty="0"/>
+              <a:t> </a:t>
+            </a:r>
+            <a:r>
+              <a:rPr lang="en-US" sz="1600" dirty="0" err="1"/>
+              <a:t>același</a:t>
+            </a:r>
+            <a:r>
+              <a:rPr lang="en-US" sz="1600" dirty="0"/>
+              <a:t> set de teste </a:t>
+            </a:r>
+            <a:r>
+              <a:rPr lang="en-US" sz="1600" dirty="0" err="1"/>
+              <a:t>observăm</a:t>
+            </a:r>
+            <a:r>
+              <a:rPr lang="en-US" sz="1600" dirty="0"/>
+              <a:t> </a:t>
+            </a:r>
+            <a:r>
+              <a:rPr lang="en-US" sz="1600" dirty="0" err="1"/>
+              <a:t>că</a:t>
+            </a:r>
+            <a:r>
+              <a:rPr lang="en-US" sz="1600" dirty="0"/>
+              <a:t> </a:t>
+            </a:r>
+            <a:r>
+              <a:rPr lang="en-US" sz="1600" dirty="0" err="1"/>
+              <a:t>toate</a:t>
+            </a:r>
+            <a:r>
+              <a:rPr lang="en-US" sz="1600" dirty="0"/>
+              <a:t> </a:t>
+            </a:r>
+            <a:r>
+              <a:rPr lang="en-US" sz="1600" dirty="0" err="1"/>
+              <a:t>testele</a:t>
+            </a:r>
+            <a:r>
+              <a:rPr lang="en-US" sz="1600" dirty="0"/>
+              <a:t> </a:t>
+            </a:r>
+            <a:r>
+              <a:rPr lang="en-US" sz="1600" dirty="0" err="1"/>
+              <a:t>trec</a:t>
+            </a:r>
+            <a:r>
+              <a:rPr lang="en-US" sz="1600" dirty="0"/>
+              <a:t> → </a:t>
+            </a:r>
+            <a:r>
+              <a:rPr lang="en-US" sz="1600" dirty="0" err="1"/>
+              <a:t>mutantul</a:t>
+            </a:r>
+            <a:r>
+              <a:rPr lang="en-US" sz="1600" dirty="0"/>
+              <a:t> </a:t>
+            </a:r>
+            <a:r>
+              <a:rPr lang="en-US" sz="1600" dirty="0" err="1"/>
+              <a:t>supraviețuiește</a:t>
+            </a:r>
+            <a:r>
+              <a:rPr lang="en-US" sz="1600" dirty="0"/>
+              <a:t>.</a:t>
+            </a:r>
+            <a:endParaRPr lang="en-US" sz="2000" dirty="0"/>
+          </a:p>
+        </p:txBody>
+      </p:sp>
+      <p:cxnSp>
+        <p:nvCxnSpPr>
+          <p:cNvPr id="15" name="Straight Connector 14">
+            <a:extLst>
+              <a:ext uri="{FF2B5EF4-FFF2-40B4-BE49-F238E27FC236}">
+                <a16:creationId xmlns:a16="http://schemas.microsoft.com/office/drawing/2014/main" id="{84B5E215-83CF-4696-8243-08D2F6BB2EF6}"/>
+              </a:ext>
+            </a:extLst>
+          </p:cNvPr>
+          <p:cNvCxnSpPr>
+            <a:cxnSpLocks/>
+          </p:cNvCxnSpPr>
+          <p:nvPr/>
+        </p:nvCxnSpPr>
+        <p:spPr>
+          <a:xfrm>
+            <a:off x="6704012" y="1643910"/>
+            <a:ext cx="0" cy="4223490"/>
+          </a:xfrm>
+          <a:prstGeom prst="line">
+            <a:avLst/>
+          </a:prstGeom>
+          <a:ln w="25400"/>
+        </p:spPr>
+        <p:style>
+          <a:lnRef idx="1">
+            <a:schemeClr val="accent1"/>
+          </a:lnRef>
+          <a:fillRef idx="0">
+            <a:schemeClr val="accent1"/>
+          </a:fillRef>
+          <a:effectRef idx="0">
+            <a:schemeClr val="accent1"/>
+          </a:effectRef>
+          <a:fontRef idx="minor">
+            <a:schemeClr val="tx1"/>
+          </a:fontRef>
+        </p:style>
+      </p:cxnSp>
+      <p:pic>
+        <p:nvPicPr>
+          <p:cNvPr id="18" name="Picture 17">
+            <a:extLst>
+              <a:ext uri="{FF2B5EF4-FFF2-40B4-BE49-F238E27FC236}">
+                <a16:creationId xmlns:a16="http://schemas.microsoft.com/office/drawing/2014/main" id="{36016C9F-9DA5-408B-87D8-C429A99FB4B4}"/>
+              </a:ext>
+            </a:extLst>
+          </p:cNvPr>
+          <p:cNvPicPr>
+            <a:picLocks noChangeAspect="1"/>
+          </p:cNvPicPr>
+          <p:nvPr/>
+        </p:nvPicPr>
+        <p:blipFill>
+          <a:blip r:embed="rId2"/>
+          <a:stretch>
+            <a:fillRect/>
+          </a:stretch>
+        </p:blipFill>
+        <p:spPr>
+          <a:xfrm>
+            <a:off x="1456270" y="2930842"/>
+            <a:ext cx="4638142" cy="2989288"/>
+          </a:xfrm>
+          <a:prstGeom prst="rect">
+            <a:avLst/>
+          </a:prstGeom>
+        </p:spPr>
+      </p:pic>
+      <p:pic>
+        <p:nvPicPr>
+          <p:cNvPr id="22" name="Picture 21">
+            <a:extLst>
+              <a:ext uri="{FF2B5EF4-FFF2-40B4-BE49-F238E27FC236}">
+                <a16:creationId xmlns:a16="http://schemas.microsoft.com/office/drawing/2014/main" id="{B9EA2F9F-5627-4D27-BFD1-B6A21FE6C23C}"/>
+              </a:ext>
+            </a:extLst>
+          </p:cNvPr>
+          <p:cNvPicPr>
+            <a:picLocks noChangeAspect="1"/>
+          </p:cNvPicPr>
+          <p:nvPr/>
+        </p:nvPicPr>
+        <p:blipFill>
+          <a:blip r:embed="rId3"/>
+          <a:stretch>
+            <a:fillRect/>
+          </a:stretch>
+        </p:blipFill>
+        <p:spPr>
+          <a:xfrm>
+            <a:off x="7192486" y="1791511"/>
+            <a:ext cx="4434522" cy="2278662"/>
+          </a:xfrm>
+          <a:prstGeom prst="rect">
+            <a:avLst/>
+          </a:prstGeom>
+        </p:spPr>
+      </p:pic>
+    </p:spTree>
+    <p:extLst>
+      <p:ext uri="{BB962C8B-B14F-4D97-AF65-F5344CB8AC3E}">
+        <p14:creationId xmlns:p14="http://schemas.microsoft.com/office/powerpoint/2010/main" val="395713153"/>
+      </p:ext>
+    </p:extLst>
+  </p:cSld>
+  <p:clrMapOvr>
+    <a:masterClrMapping/>
+  </p:clrMapOvr>
+  <mc:AlternateContent xmlns:mc="http://schemas.openxmlformats.org/markup-compatibility/2006" xmlns:p14="http://schemas.microsoft.com/office/powerpoint/2010/main">
+    <mc:Choice Requires="p14">
+      <p:transition spd="med" p14:dur="700">
+        <p:fade/>
+      </p:transition>
+    </mc:Choice>
+    <mc:Fallback xmlns="">
+      <p:transition spd="med">
+        <p:fade/>
+      </p:transition>
+    </mc:Fallback>
+  </mc:AlternateContent>
+</p:sld>
+</file>
+
+<file path=ppt/slides/slide16.xml><?xml version="1.0" encoding="utf-8"?>
+<p:sld xmlns:a="http://schemas.openxmlformats.org/drawingml/2006/main" xmlns:r="http://schemas.openxmlformats.org/officeDocument/2006/relationships" xmlns:p="http://schemas.openxmlformats.org/presentationml/2006/main">
+  <p:cSld>
+    <p:spTree>
+      <p:nvGrpSpPr>
+        <p:cNvPr id="1" name=""/>
+        <p:cNvGrpSpPr/>
+        <p:nvPr/>
+      </p:nvGrpSpPr>
+      <p:grpSpPr>
+        <a:xfrm>
+          <a:off x="0" y="0"/>
+          <a:ext cx="0" cy="0"/>
+          <a:chOff x="0" y="0"/>
+          <a:chExt cx="0" cy="0"/>
+        </a:xfrm>
+      </p:grpSpPr>
+      <p:sp>
+        <p:nvSpPr>
+          <p:cNvPr id="2" name="Title 1">
+            <a:extLst>
+              <a:ext uri="{FF2B5EF4-FFF2-40B4-BE49-F238E27FC236}">
+                <a16:creationId xmlns:a16="http://schemas.microsoft.com/office/drawing/2014/main" id="{6FB39475-A829-4B64-AF16-91699C33C979}"/>
+              </a:ext>
+            </a:extLst>
+          </p:cNvPr>
+          <p:cNvSpPr>
+            <a:spLocks noGrp="1"/>
+          </p:cNvSpPr>
+          <p:nvPr>
+            <p:ph type="title"/>
+          </p:nvPr>
+        </p:nvSpPr>
+        <p:spPr/>
+        <p:txBody>
+          <a:bodyPr/>
+          <a:lstStyle/>
+          <a:p>
+            <a:r>
+              <a:rPr lang="ro-RO" dirty="0" err="1"/>
+              <a:t>GradeCheckMutant</a:t>
+            </a:r>
+            <a:r>
+              <a:rPr lang="en-US" dirty="0"/>
+              <a:t>Equivalent</a:t>
+            </a:r>
+          </a:p>
+        </p:txBody>
+      </p:sp>
+      <p:sp>
+        <p:nvSpPr>
+          <p:cNvPr id="4" name="Content Placeholder 3">
+            <a:extLst>
+              <a:ext uri="{FF2B5EF4-FFF2-40B4-BE49-F238E27FC236}">
+                <a16:creationId xmlns:a16="http://schemas.microsoft.com/office/drawing/2014/main" id="{608A5CC3-8D86-4BDD-BD6E-21C9CD6FEB89}"/>
+              </a:ext>
+            </a:extLst>
+          </p:cNvPr>
+          <p:cNvSpPr>
+            <a:spLocks noGrp="1"/>
+          </p:cNvSpPr>
+          <p:nvPr>
+            <p:ph sz="half" idx="1"/>
+          </p:nvPr>
+        </p:nvSpPr>
+        <p:spPr>
+          <a:xfrm>
+            <a:off x="1482643" y="1643910"/>
+            <a:ext cx="4723128" cy="1223963"/>
+          </a:xfrm>
+        </p:spPr>
+        <p:txBody>
+          <a:bodyPr>
+            <a:normAutofit/>
+          </a:bodyPr>
+          <a:lstStyle/>
+          <a:p>
+            <a:pPr marL="0" indent="0">
+              <a:buNone/>
+            </a:pPr>
+            <a:r>
+              <a:rPr lang="en-US" sz="1600" dirty="0" err="1"/>
+              <a:t>Condiția</a:t>
+            </a:r>
+            <a:r>
+              <a:rPr lang="en-US" sz="1600" dirty="0"/>
+              <a:t> a </a:t>
+            </a:r>
+            <a:r>
+              <a:rPr lang="en-US" sz="1600" dirty="0" err="1"/>
+              <a:t>fost</a:t>
+            </a:r>
+            <a:r>
+              <a:rPr lang="en-US" sz="1600" dirty="0"/>
+              <a:t> </a:t>
+            </a:r>
+            <a:r>
+              <a:rPr lang="en-US" sz="1600" dirty="0" err="1"/>
+              <a:t>rescrisă</a:t>
+            </a:r>
+            <a:r>
+              <a:rPr lang="en-US" sz="1600" dirty="0"/>
+              <a:t> </a:t>
+            </a:r>
+            <a:r>
+              <a:rPr lang="en-US" sz="1600" dirty="0" err="1"/>
+              <a:t>într</a:t>
+            </a:r>
+            <a:r>
+              <a:rPr lang="en-US" sz="1600" dirty="0"/>
+              <a:t>-o </a:t>
+            </a:r>
+            <a:r>
+              <a:rPr lang="en-US" sz="1600" dirty="0" err="1"/>
+              <a:t>formă</a:t>
+            </a:r>
+            <a:r>
+              <a:rPr lang="en-US" sz="1600" dirty="0"/>
+              <a:t> logic </a:t>
+            </a:r>
+            <a:r>
+              <a:rPr lang="en-US" sz="1600" dirty="0" err="1"/>
+              <a:t>echivalentă</a:t>
+            </a:r>
+            <a:r>
+              <a:rPr lang="en-US" sz="1600" dirty="0"/>
+              <a:t>:</a:t>
+            </a:r>
+            <a:br>
+              <a:rPr lang="en-US" sz="1600" dirty="0"/>
+            </a:br>
+            <a:r>
+              <a:rPr lang="en-US" sz="1600" dirty="0"/>
+              <a:t>(average &lt; 5) → !(average &gt;= 5)</a:t>
+            </a:r>
+            <a:br>
+              <a:rPr lang="en-US" sz="1600" dirty="0"/>
+            </a:br>
+            <a:br>
+              <a:rPr lang="en-US" sz="1600" dirty="0"/>
+            </a:br>
+            <a:r>
+              <a:rPr lang="en-US" sz="1600" dirty="0" err="1"/>
+              <a:t>Expresia</a:t>
+            </a:r>
+            <a:r>
+              <a:rPr lang="en-US" sz="1600" dirty="0"/>
+              <a:t> </a:t>
+            </a:r>
+            <a:r>
+              <a:rPr lang="en-US" sz="1600" dirty="0" err="1"/>
+              <a:t>este</a:t>
+            </a:r>
+            <a:r>
+              <a:rPr lang="en-US" sz="1600" dirty="0"/>
+              <a:t> </a:t>
+            </a:r>
+            <a:r>
+              <a:rPr lang="en-US" sz="1600" dirty="0" err="1"/>
+              <a:t>diferită</a:t>
+            </a:r>
+            <a:r>
+              <a:rPr lang="en-US" sz="1600" dirty="0"/>
+              <a:t> </a:t>
+            </a:r>
+            <a:r>
+              <a:rPr lang="en-US" sz="1600" dirty="0" err="1"/>
+              <a:t>sintactic</a:t>
+            </a:r>
+            <a:r>
+              <a:rPr lang="en-US" sz="1600" dirty="0"/>
+              <a:t>, </a:t>
+            </a:r>
+            <a:r>
+              <a:rPr lang="en-US" sz="1600" dirty="0" err="1"/>
+              <a:t>dar</a:t>
+            </a:r>
+            <a:r>
+              <a:rPr lang="en-US" sz="1600" dirty="0"/>
+              <a:t> </a:t>
+            </a:r>
+            <a:r>
+              <a:rPr lang="en-US" sz="1600" dirty="0" err="1"/>
+              <a:t>echivalentă</a:t>
+            </a:r>
+            <a:r>
+              <a:rPr lang="en-US" sz="1600" dirty="0"/>
+              <a:t> logic.</a:t>
+            </a:r>
+            <a:endParaRPr lang="en-US" sz="2400" dirty="0"/>
+          </a:p>
+        </p:txBody>
+      </p:sp>
+      <p:sp>
+        <p:nvSpPr>
+          <p:cNvPr id="14" name="TextBox 13">
+            <a:extLst>
+              <a:ext uri="{FF2B5EF4-FFF2-40B4-BE49-F238E27FC236}">
+                <a16:creationId xmlns:a16="http://schemas.microsoft.com/office/drawing/2014/main" id="{7D54C3B9-9286-4AFA-8E73-507D5801928E}"/>
+              </a:ext>
+            </a:extLst>
+          </p:cNvPr>
+          <p:cNvSpPr txBox="1"/>
+          <p:nvPr/>
+        </p:nvSpPr>
+        <p:spPr>
+          <a:xfrm>
+            <a:off x="7123736" y="4458571"/>
+            <a:ext cx="4503409" cy="830997"/>
+          </a:xfrm>
+          <a:prstGeom prst="rect">
+            <a:avLst/>
+          </a:prstGeom>
+          <a:noFill/>
+        </p:spPr>
+        <p:txBody>
+          <a:bodyPr wrap="square">
+            <a:spAutoFit/>
+          </a:bodyPr>
+          <a:lstStyle/>
+          <a:p>
+            <a:r>
+              <a:rPr lang="en-US" sz="1600" dirty="0" err="1"/>
+              <a:t>Rulând</a:t>
+            </a:r>
+            <a:r>
+              <a:rPr lang="en-US" sz="1600" dirty="0"/>
+              <a:t> </a:t>
+            </a:r>
+            <a:r>
+              <a:rPr lang="en-US" sz="1600" dirty="0" err="1"/>
+              <a:t>același</a:t>
+            </a:r>
+            <a:r>
+              <a:rPr lang="en-US" sz="1600" dirty="0"/>
+              <a:t> set de teste </a:t>
+            </a:r>
+            <a:r>
+              <a:rPr lang="en-US" sz="1600" dirty="0" err="1"/>
+              <a:t>observăm</a:t>
+            </a:r>
+            <a:r>
+              <a:rPr lang="en-US" sz="1600" dirty="0"/>
+              <a:t> </a:t>
+            </a:r>
+            <a:r>
+              <a:rPr lang="en-US" sz="1600" dirty="0" err="1"/>
+              <a:t>că</a:t>
+            </a:r>
+            <a:r>
+              <a:rPr lang="en-US" sz="1600" dirty="0"/>
+              <a:t> </a:t>
+            </a:r>
+            <a:r>
+              <a:rPr lang="en-US" sz="1600" dirty="0" err="1"/>
+              <a:t>rezultatele</a:t>
+            </a:r>
+            <a:r>
+              <a:rPr lang="en-US" sz="1600" dirty="0"/>
+              <a:t> </a:t>
+            </a:r>
+            <a:r>
+              <a:rPr lang="en-US" sz="1600" dirty="0" err="1"/>
+              <a:t>rămân</a:t>
+            </a:r>
+            <a:r>
+              <a:rPr lang="en-US" sz="1600" dirty="0"/>
+              <a:t> </a:t>
+            </a:r>
+            <a:r>
+              <a:rPr lang="en-US" sz="1600" dirty="0" err="1"/>
+              <a:t>identice</a:t>
+            </a:r>
+            <a:r>
+              <a:rPr lang="en-US" sz="1600" dirty="0"/>
+              <a:t> </a:t>
+            </a:r>
+            <a:r>
+              <a:rPr lang="ro-RO" sz="1600" dirty="0"/>
+              <a:t>și știind că logica programului nu s-a schimbat </a:t>
+            </a:r>
+            <a:r>
+              <a:rPr lang="en-US" sz="1600" dirty="0"/>
+              <a:t>→ mutant </a:t>
+            </a:r>
+            <a:r>
+              <a:rPr lang="en-US" sz="1600" dirty="0" err="1"/>
+              <a:t>echivalent</a:t>
+            </a:r>
+            <a:endParaRPr lang="en-US" sz="1600" dirty="0"/>
+          </a:p>
+        </p:txBody>
+      </p:sp>
+      <p:cxnSp>
+        <p:nvCxnSpPr>
+          <p:cNvPr id="15" name="Straight Connector 14">
+            <a:extLst>
+              <a:ext uri="{FF2B5EF4-FFF2-40B4-BE49-F238E27FC236}">
+                <a16:creationId xmlns:a16="http://schemas.microsoft.com/office/drawing/2014/main" id="{84B5E215-83CF-4696-8243-08D2F6BB2EF6}"/>
+              </a:ext>
+            </a:extLst>
+          </p:cNvPr>
+          <p:cNvCxnSpPr>
+            <a:cxnSpLocks/>
+          </p:cNvCxnSpPr>
+          <p:nvPr/>
+        </p:nvCxnSpPr>
+        <p:spPr>
+          <a:xfrm>
+            <a:off x="6704012" y="1643910"/>
+            <a:ext cx="0" cy="4223490"/>
+          </a:xfrm>
+          <a:prstGeom prst="line">
+            <a:avLst/>
+          </a:prstGeom>
+          <a:ln w="25400"/>
+        </p:spPr>
+        <p:style>
+          <a:lnRef idx="1">
+            <a:schemeClr val="accent1"/>
+          </a:lnRef>
+          <a:fillRef idx="0">
+            <a:schemeClr val="accent1"/>
+          </a:fillRef>
+          <a:effectRef idx="0">
+            <a:schemeClr val="accent1"/>
+          </a:effectRef>
+          <a:fontRef idx="minor">
+            <a:schemeClr val="tx1"/>
+          </a:fontRef>
+        </p:style>
+      </p:cxnSp>
+      <p:pic>
+        <p:nvPicPr>
+          <p:cNvPr id="13" name="Picture 12">
+            <a:extLst>
+              <a:ext uri="{FF2B5EF4-FFF2-40B4-BE49-F238E27FC236}">
+                <a16:creationId xmlns:a16="http://schemas.microsoft.com/office/drawing/2014/main" id="{83F3A582-9DC5-4E19-A6BF-A299C048DE89}"/>
+              </a:ext>
+            </a:extLst>
+          </p:cNvPr>
+          <p:cNvPicPr>
+            <a:picLocks noChangeAspect="1"/>
+          </p:cNvPicPr>
+          <p:nvPr/>
+        </p:nvPicPr>
+        <p:blipFill>
+          <a:blip r:embed="rId2"/>
+          <a:stretch>
+            <a:fillRect/>
+          </a:stretch>
+        </p:blipFill>
+        <p:spPr>
+          <a:xfrm>
+            <a:off x="1482643" y="2971800"/>
+            <a:ext cx="4735329" cy="3045012"/>
+          </a:xfrm>
+          <a:prstGeom prst="rect">
+            <a:avLst/>
+          </a:prstGeom>
+        </p:spPr>
+      </p:pic>
+      <p:pic>
+        <p:nvPicPr>
+          <p:cNvPr id="17" name="Picture 16">
+            <a:extLst>
+              <a:ext uri="{FF2B5EF4-FFF2-40B4-BE49-F238E27FC236}">
+                <a16:creationId xmlns:a16="http://schemas.microsoft.com/office/drawing/2014/main" id="{FF69C398-60B3-4900-8573-7621CF64BB05}"/>
+              </a:ext>
+            </a:extLst>
+          </p:cNvPr>
+          <p:cNvPicPr>
+            <a:picLocks noChangeAspect="1"/>
+          </p:cNvPicPr>
+          <p:nvPr/>
+        </p:nvPicPr>
+        <p:blipFill>
+          <a:blip r:embed="rId3"/>
+          <a:stretch>
+            <a:fillRect/>
+          </a:stretch>
+        </p:blipFill>
+        <p:spPr>
+          <a:xfrm>
+            <a:off x="7123737" y="1842372"/>
+            <a:ext cx="4503413" cy="2272427"/>
+          </a:xfrm>
+          <a:prstGeom prst="rect">
+            <a:avLst/>
+          </a:prstGeom>
+        </p:spPr>
+      </p:pic>
+    </p:spTree>
+    <p:extLst>
+      <p:ext uri="{BB962C8B-B14F-4D97-AF65-F5344CB8AC3E}">
+        <p14:creationId xmlns:p14="http://schemas.microsoft.com/office/powerpoint/2010/main" val="3973898796"/>
+      </p:ext>
+    </p:extLst>
+  </p:cSld>
+  <p:clrMapOvr>
+    <a:masterClrMapping/>
+  </p:clrMapOvr>
+  <mc:AlternateContent xmlns:mc="http://schemas.openxmlformats.org/markup-compatibility/2006" xmlns:p14="http://schemas.microsoft.com/office/powerpoint/2010/main">
+    <mc:Choice Requires="p14">
+      <p:transition spd="med" p14:dur="700">
+        <p:fade/>
+      </p:transition>
+    </mc:Choice>
+    <mc:Fallback xmlns="">
+      <p:transition spd="med">
+        <p:fade/>
+      </p:transition>
+    </mc:Fallback>
+  </mc:AlternateContent>
+</p:sld>
+</file>
+
+<file path=ppt/slides/slide17.xml><?xml version="1.0" encoding="utf-8"?>
+<p:sld xmlns:a="http://schemas.openxmlformats.org/drawingml/2006/main" xmlns:r="http://schemas.openxmlformats.org/officeDocument/2006/relationships" xmlns:p="http://schemas.openxmlformats.org/presentationml/2006/main">
+  <p:cSld>
+    <p:spTree>
+      <p:nvGrpSpPr>
+        <p:cNvPr id="1" name=""/>
+        <p:cNvGrpSpPr/>
+        <p:nvPr/>
+      </p:nvGrpSpPr>
+      <p:grpSpPr>
+        <a:xfrm>
+          <a:off x="0" y="0"/>
+          <a:ext cx="0" cy="0"/>
+          <a:chOff x="0" y="0"/>
+          <a:chExt cx="0" cy="0"/>
+        </a:xfrm>
+      </p:grpSpPr>
+      <p:sp>
+        <p:nvSpPr>
+          <p:cNvPr id="2" name="Title 1">
+            <a:extLst>
+              <a:ext uri="{FF2B5EF4-FFF2-40B4-BE49-F238E27FC236}">
+                <a16:creationId xmlns:a16="http://schemas.microsoft.com/office/drawing/2014/main" id="{92BBEA93-9A85-4513-B217-775466981441}"/>
+              </a:ext>
+            </a:extLst>
+          </p:cNvPr>
+          <p:cNvSpPr>
+            <a:spLocks noGrp="1"/>
+          </p:cNvSpPr>
+          <p:nvPr>
+            <p:ph type="title"/>
+          </p:nvPr>
+        </p:nvSpPr>
+        <p:spPr/>
+        <p:txBody>
+          <a:bodyPr/>
+          <a:lstStyle/>
+          <a:p>
+            <a:r>
+              <a:rPr lang="en-US" dirty="0" err="1"/>
+              <a:t>Concluzii</a:t>
+            </a:r>
+            <a:endParaRPr lang="en-US" dirty="0"/>
+          </a:p>
+        </p:txBody>
+      </p:sp>
+      <p:sp>
+        <p:nvSpPr>
+          <p:cNvPr id="6" name="Content Placeholder 5">
+            <a:extLst>
+              <a:ext uri="{FF2B5EF4-FFF2-40B4-BE49-F238E27FC236}">
+                <a16:creationId xmlns:a16="http://schemas.microsoft.com/office/drawing/2014/main" id="{FC563E69-A84F-4BE3-83F3-FA72ACF9444E}"/>
+              </a:ext>
+            </a:extLst>
+          </p:cNvPr>
+          <p:cNvSpPr>
+            <a:spLocks noGrp="1"/>
+          </p:cNvSpPr>
+          <p:nvPr>
+            <p:ph idx="1"/>
+          </p:nvPr>
+        </p:nvSpPr>
+        <p:spPr/>
+        <p:txBody>
+          <a:bodyPr/>
+          <a:lstStyle/>
+          <a:p>
+            <a:r>
+              <a:rPr lang="en-US" dirty="0" err="1"/>
+              <a:t>Aplicația</a:t>
+            </a:r>
+            <a:r>
+              <a:rPr lang="en-US" dirty="0"/>
+              <a:t> a </a:t>
+            </a:r>
+            <a:r>
+              <a:rPr lang="en-US" dirty="0" err="1"/>
+              <a:t>fost</a:t>
+            </a:r>
+            <a:r>
+              <a:rPr lang="en-US" dirty="0"/>
+              <a:t> </a:t>
+            </a:r>
+            <a:r>
+              <a:rPr lang="en-US" dirty="0" err="1"/>
+              <a:t>modelată</a:t>
+            </a:r>
+            <a:r>
+              <a:rPr lang="en-US" dirty="0"/>
+              <a:t> </a:t>
+            </a:r>
+            <a:r>
+              <a:rPr lang="en-US" dirty="0" err="1"/>
+              <a:t>și</a:t>
+            </a:r>
+            <a:r>
+              <a:rPr lang="en-US" dirty="0"/>
+              <a:t> </a:t>
+            </a:r>
+            <a:r>
+              <a:rPr lang="en-US" dirty="0" err="1"/>
+              <a:t>analizată</a:t>
+            </a:r>
+            <a:r>
+              <a:rPr lang="en-US" dirty="0"/>
+              <a:t> </a:t>
+            </a:r>
+            <a:r>
+              <a:rPr lang="en-US" dirty="0" err="1"/>
+              <a:t>complet</a:t>
+            </a:r>
+            <a:r>
+              <a:rPr lang="en-US" dirty="0"/>
+              <a:t> </a:t>
+            </a:r>
+            <a:r>
+              <a:rPr lang="en-US" dirty="0" err="1"/>
+              <a:t>prin</a:t>
+            </a:r>
+            <a:r>
+              <a:rPr lang="en-US" dirty="0"/>
+              <a:t> </a:t>
+            </a:r>
+            <a:r>
+              <a:rPr lang="en-US" dirty="0" err="1"/>
+              <a:t>graf</a:t>
+            </a:r>
+            <a:r>
+              <a:rPr lang="en-US" dirty="0"/>
+              <a:t> de control</a:t>
+            </a:r>
+          </a:p>
+          <a:p>
+            <a:r>
+              <a:rPr lang="fr-FR" dirty="0"/>
+              <a:t>Au </a:t>
+            </a:r>
+            <a:r>
+              <a:rPr lang="fr-FR" dirty="0" err="1"/>
+              <a:t>fost</a:t>
+            </a:r>
+            <a:r>
+              <a:rPr lang="fr-FR" dirty="0"/>
+              <a:t> </a:t>
+            </a:r>
+            <a:r>
+              <a:rPr lang="fr-FR" dirty="0" err="1"/>
+              <a:t>aplicate</a:t>
+            </a:r>
+            <a:r>
+              <a:rPr lang="fr-FR" dirty="0"/>
+              <a:t> </a:t>
+            </a:r>
+            <a:r>
+              <a:rPr lang="fr-FR" dirty="0" err="1"/>
+              <a:t>toate</a:t>
+            </a:r>
+            <a:r>
+              <a:rPr lang="fr-FR" dirty="0"/>
+              <a:t> </a:t>
+            </a:r>
+            <a:r>
+              <a:rPr lang="fr-FR" dirty="0" err="1"/>
+              <a:t>criteriile</a:t>
+            </a:r>
+            <a:r>
+              <a:rPr lang="fr-FR" dirty="0"/>
+              <a:t> de </a:t>
+            </a:r>
+            <a:r>
+              <a:rPr lang="fr-FR" dirty="0" err="1"/>
+              <a:t>testare</a:t>
+            </a:r>
+            <a:r>
+              <a:rPr lang="fr-FR" dirty="0"/>
+              <a:t> </a:t>
+            </a:r>
+            <a:r>
+              <a:rPr lang="fr-FR" dirty="0" err="1"/>
+              <a:t>structurală</a:t>
+            </a:r>
+            <a:r>
+              <a:rPr lang="fr-FR" dirty="0"/>
+              <a:t>:</a:t>
+            </a:r>
+            <a:br>
+              <a:rPr lang="fr-FR" dirty="0"/>
+            </a:br>
+            <a:r>
+              <a:rPr lang="fr-FR" dirty="0" err="1"/>
+              <a:t>Statement</a:t>
+            </a:r>
+            <a:r>
+              <a:rPr lang="fr-FR" dirty="0"/>
+              <a:t>, </a:t>
+            </a:r>
+            <a:r>
+              <a:rPr lang="fr-FR" dirty="0" err="1"/>
+              <a:t>Decision</a:t>
+            </a:r>
+            <a:r>
+              <a:rPr lang="fr-FR" dirty="0"/>
+              <a:t>, Condition </a:t>
+            </a:r>
+            <a:r>
+              <a:rPr lang="fr-FR" dirty="0" err="1"/>
+              <a:t>și</a:t>
+            </a:r>
+            <a:r>
+              <a:rPr lang="fr-FR" dirty="0"/>
+              <a:t> MC/DC (100%)</a:t>
+            </a:r>
+            <a:endParaRPr lang="en-US" dirty="0"/>
+          </a:p>
+          <a:p>
+            <a:r>
+              <a:rPr lang="en-US" dirty="0" err="1"/>
+              <a:t>Testele</a:t>
+            </a:r>
+            <a:r>
+              <a:rPr lang="en-US" dirty="0"/>
+              <a:t> au </a:t>
+            </a:r>
+            <a:r>
+              <a:rPr lang="en-US" dirty="0" err="1"/>
+              <a:t>fost</a:t>
+            </a:r>
+            <a:r>
+              <a:rPr lang="en-US" dirty="0"/>
+              <a:t> </a:t>
+            </a:r>
+            <a:r>
+              <a:rPr lang="en-US" dirty="0" err="1"/>
+              <a:t>implementate</a:t>
+            </a:r>
+            <a:r>
+              <a:rPr lang="en-US" dirty="0"/>
+              <a:t> </a:t>
+            </a:r>
+            <a:r>
+              <a:rPr lang="en-US" dirty="0" err="1"/>
+              <a:t>folosind</a:t>
+            </a:r>
+            <a:r>
+              <a:rPr lang="en-US" dirty="0"/>
+              <a:t> JUnit,</a:t>
+            </a:r>
+            <a:br>
+              <a:rPr lang="en-US" dirty="0"/>
+            </a:br>
+            <a:r>
+              <a:rPr lang="en-US" dirty="0" err="1"/>
+              <a:t>validând</a:t>
+            </a:r>
+            <a:r>
+              <a:rPr lang="en-US" dirty="0"/>
+              <a:t> automat </a:t>
+            </a:r>
+            <a:r>
+              <a:rPr lang="en-US" dirty="0" err="1"/>
+              <a:t>corectitudinea</a:t>
+            </a:r>
+            <a:r>
+              <a:rPr lang="en-US" dirty="0"/>
+              <a:t> </a:t>
+            </a:r>
+            <a:r>
+              <a:rPr lang="en-US" dirty="0" err="1"/>
+              <a:t>logicii</a:t>
+            </a:r>
+            <a:r>
+              <a:rPr lang="en-US" dirty="0"/>
+              <a:t> </a:t>
+            </a:r>
+            <a:r>
+              <a:rPr lang="en-US" dirty="0" err="1"/>
+              <a:t>aplicației</a:t>
+            </a:r>
+            <a:endParaRPr lang="en-US" dirty="0"/>
+          </a:p>
+          <a:p>
+            <a:r>
+              <a:rPr lang="en-US" dirty="0"/>
+              <a:t>Mutation testing a </a:t>
+            </a:r>
+            <a:r>
+              <a:rPr lang="en-US" dirty="0" err="1"/>
+              <a:t>confirmat</a:t>
+            </a:r>
+            <a:r>
+              <a:rPr lang="en-US" dirty="0"/>
+              <a:t> </a:t>
+            </a:r>
+            <a:r>
+              <a:rPr lang="en-US" dirty="0" err="1"/>
+              <a:t>eficiența</a:t>
+            </a:r>
+            <a:r>
+              <a:rPr lang="en-US" dirty="0"/>
+              <a:t> </a:t>
+            </a:r>
+            <a:r>
+              <a:rPr lang="en-US" dirty="0" err="1"/>
+              <a:t>testelor</a:t>
+            </a:r>
+            <a:r>
+              <a:rPr lang="en-US" dirty="0"/>
+              <a:t>,</a:t>
+            </a:r>
+            <a:br>
+              <a:rPr lang="en-US" dirty="0"/>
+            </a:br>
+            <a:r>
+              <a:rPr lang="en-US" dirty="0" err="1"/>
+              <a:t>evidențiind</a:t>
+            </a:r>
+            <a:r>
+              <a:rPr lang="en-US" dirty="0"/>
+              <a:t> </a:t>
+            </a:r>
+            <a:r>
+              <a:rPr lang="en-US" dirty="0" err="1"/>
+              <a:t>atât</a:t>
+            </a:r>
+            <a:r>
+              <a:rPr lang="en-US" dirty="0"/>
+              <a:t> </a:t>
+            </a:r>
+            <a:r>
+              <a:rPr lang="en-US" dirty="0" err="1"/>
+              <a:t>mutanți</a:t>
+            </a:r>
+            <a:r>
+              <a:rPr lang="en-US" dirty="0"/>
+              <a:t> </a:t>
+            </a:r>
+            <a:r>
+              <a:rPr lang="en-US" dirty="0" err="1"/>
+              <a:t>eliminați</a:t>
+            </a:r>
+            <a:r>
+              <a:rPr lang="en-US" dirty="0"/>
+              <a:t>, </a:t>
+            </a:r>
+            <a:r>
+              <a:rPr lang="en-US" dirty="0" err="1"/>
+              <a:t>cât</a:t>
+            </a:r>
+            <a:r>
+              <a:rPr lang="en-US" dirty="0"/>
+              <a:t> </a:t>
+            </a:r>
+            <a:r>
+              <a:rPr lang="en-US" dirty="0" err="1"/>
+              <a:t>și</a:t>
+            </a:r>
+            <a:r>
+              <a:rPr lang="en-US" dirty="0"/>
+              <a:t> </a:t>
+            </a:r>
+            <a:r>
+              <a:rPr lang="en-US" dirty="0" err="1"/>
+              <a:t>cazuri</a:t>
+            </a:r>
+            <a:r>
+              <a:rPr lang="en-US" dirty="0"/>
+              <a:t> </a:t>
+            </a:r>
+            <a:r>
+              <a:rPr lang="en-US" dirty="0" err="1"/>
+              <a:t>limită</a:t>
+            </a:r>
+            <a:r>
+              <a:rPr lang="en-US" dirty="0"/>
+              <a:t> </a:t>
+            </a:r>
+            <a:r>
+              <a:rPr lang="en-US" dirty="0" err="1"/>
+              <a:t>nedetectate</a:t>
+            </a:r>
+            <a:endParaRPr lang="en-US" dirty="0"/>
+          </a:p>
+          <a:p>
+            <a:r>
+              <a:rPr lang="en-US" dirty="0" err="1"/>
+              <a:t>Soluția</a:t>
+            </a:r>
+            <a:r>
+              <a:rPr lang="en-US" dirty="0"/>
+              <a:t> </a:t>
+            </a:r>
+            <a:r>
+              <a:rPr lang="en-US" dirty="0" err="1"/>
+              <a:t>este</a:t>
+            </a:r>
+            <a:r>
+              <a:rPr lang="en-US" dirty="0"/>
+              <a:t> </a:t>
+            </a:r>
+            <a:r>
+              <a:rPr lang="en-US" dirty="0" err="1"/>
+              <a:t>corectă</a:t>
+            </a:r>
+            <a:r>
+              <a:rPr lang="en-US" dirty="0"/>
+              <a:t>, </a:t>
+            </a:r>
+            <a:r>
+              <a:rPr lang="en-US" dirty="0" err="1"/>
+              <a:t>completă</a:t>
+            </a:r>
+            <a:r>
+              <a:rPr lang="en-US" dirty="0"/>
+              <a:t> </a:t>
+            </a:r>
+            <a:r>
+              <a:rPr lang="en-US" dirty="0" err="1"/>
+              <a:t>și</a:t>
+            </a:r>
+            <a:r>
+              <a:rPr lang="en-US" dirty="0"/>
+              <a:t> bine </a:t>
+            </a:r>
+            <a:r>
+              <a:rPr lang="en-US" dirty="0" err="1"/>
+              <a:t>acoperită</a:t>
+            </a:r>
+            <a:r>
+              <a:rPr lang="en-US" dirty="0"/>
+              <a:t> </a:t>
+            </a:r>
+            <a:r>
+              <a:rPr lang="en-US" dirty="0" err="1"/>
+              <a:t>prin</a:t>
+            </a:r>
+            <a:r>
+              <a:rPr lang="en-US" dirty="0"/>
+              <a:t> teste</a:t>
+            </a:r>
+          </a:p>
+        </p:txBody>
+      </p:sp>
+    </p:spTree>
+    <p:extLst>
+      <p:ext uri="{BB962C8B-B14F-4D97-AF65-F5344CB8AC3E}">
+        <p14:creationId xmlns:p14="http://schemas.microsoft.com/office/powerpoint/2010/main" val="1028961291"/>
+      </p:ext>
+    </p:extLst>
+  </p:cSld>
+  <p:clrMapOvr>
+    <a:masterClrMapping/>
+  </p:clrMapOvr>
+  <mc:AlternateContent xmlns:mc="http://schemas.openxmlformats.org/markup-compatibility/2006" xmlns:p14="http://schemas.microsoft.com/office/powerpoint/2010/main">
+    <mc:Choice Requires="p14">
+      <p:transition spd="med" p14:dur="700">
+        <p:fade/>
+      </p:transition>
+    </mc:Choice>
+    <mc:Fallback xmlns="">
+      <p:transition spd="med">
+        <p:fade/>
+      </p:transition>
+    </mc:Fallback>
+  </mc:AlternateContent>
+</p:sld>
+</file>
+
 <file path=ppt/slides/slide2.xml><?xml version="1.0" encoding="utf-8"?>
 <p:sld xmlns:a="http://schemas.openxmlformats.org/drawingml/2006/main" xmlns:r="http://schemas.openxmlformats.org/officeDocument/2006/relationships" xmlns:p="http://schemas.openxmlformats.org/presentationml/2006/main">
   <p:cSld>
@@ -9495,7 +11567,7 @@
             <p:ph idx="1"/>
             <p:extLst>
               <p:ext uri="{D42A27DB-BD31-4B8C-83A1-F6EECF244321}">
-                <p14:modId xmlns:p14="http://schemas.microsoft.com/office/powerpoint/2010/main" val="1593829032"/>
+                <p14:modId xmlns:p14="http://schemas.microsoft.com/office/powerpoint/2010/main" val="2279926350"/>
               </p:ext>
             </p:extLst>
           </p:nvPr>
@@ -10130,9 +12202,20 @@
                       <a:pPr algn="ctr"/>
                       <a:r>
                         <a:rPr lang="ro-RO" dirty="0"/>
-                        <a:t>5, 7, 8</a:t>
-                      </a:r>
-                      <a:endParaRPr lang="en-US" dirty="0"/>
+                        <a:t>5, </a:t>
+                      </a:r>
+                      <a:r>
+                        <a:rPr lang="en-US" dirty="0"/>
+                        <a:t>5</a:t>
+                      </a:r>
+                      <a:r>
+                        <a:rPr lang="ro-RO" dirty="0"/>
+                        <a:t>, </a:t>
+                      </a:r>
+                      <a:r>
+                        <a:rPr lang="en-US" dirty="0"/>
+                        <a:t>5</a:t>
+                      </a:r>
                     </a:p>
                   </a:txBody>
                   <a:tcPr/>
@@ -12374,7 +14457,7 @@
           <p:nvPr>
             <p:extLst>
               <p:ext uri="{D42A27DB-BD31-4B8C-83A1-F6EECF244321}">
-                <p14:modId xmlns:p14="http://schemas.microsoft.com/office/powerpoint/2010/main" val="1842319643"/>
+                <p14:modId xmlns:p14="http://schemas.microsoft.com/office/powerpoint/2010/main" val="3308625582"/>
               </p:ext>
             </p:extLst>
           </p:nvPr>
@@ -12589,9 +14672,20 @@
                       <a:pPr algn="ctr"/>
                       <a:r>
                         <a:rPr lang="ro-RO" dirty="0"/>
-                        <a:t>5, 7, 8</a:t>
-                      </a:r>
-                      <a:endParaRPr lang="en-US" dirty="0"/>
+                        <a:t>5, </a:t>
+                      </a:r>
+                      <a:r>
+                        <a:rPr lang="en-US" dirty="0"/>
+                        <a:t>5</a:t>
+                      </a:r>
+                      <a:r>
+                        <a:rPr lang="ro-RO" dirty="0"/>
+                        <a:t>, </a:t>
+                      </a:r>
+                      <a:r>
+                        <a:rPr lang="en-US" dirty="0"/>
+                        <a:t>5</a:t>
+                      </a:r>
                     </a:p>
                   </a:txBody>
                   <a:tcPr/>
@@ -14586,15 +16680,6 @@
 </file>
 
 <file path=customXml/item1.xml><?xml version="1.0" encoding="utf-8"?>
-<?mso-contentType ?>
-<FormTemplates xmlns="http://schemas.microsoft.com/sharepoint/v3/contenttype/forms">
-  <Display>DocumentLibraryForm</Display>
-  <Edit>AssetEditForm</Edit>
-  <New>DocumentLibraryForm</New>
-</FormTemplates>
-</file>
-
-<file path=customXml/item2.xml><?xml version="1.0" encoding="utf-8"?>
 <p:properties xmlns:p="http://schemas.microsoft.com/office/2006/metadata/properties" xmlns:xsi="http://www.w3.org/2001/XMLSchema-instance" xmlns:pc="http://schemas.microsoft.com/office/infopath/2007/PartnerControls">
   <documentManagement>
     <LocPublishedLinkedAssetsLookup xmlns="4873beb7-5857-4685-be1f-d57550cc96cc" xsi:nil="true"/>
@@ -14728,6 +16813,15 @@
     <LocMarketGroupTiers2 xmlns="4873beb7-5857-4685-be1f-d57550cc96cc" xsi:nil="true"/>
   </documentManagement>
 </p:properties>
+</file>
+
+<file path=customXml/item2.xml><?xml version="1.0" encoding="utf-8"?>
+<?mso-contentType ?>
+<FormTemplates xmlns="http://schemas.microsoft.com/sharepoint/v3/contenttype/forms">
+  <Display>DocumentLibraryForm</Display>
+  <Edit>AssetEditForm</Edit>
+  <New>DocumentLibraryForm</New>
+</FormTemplates>
 </file>
 
 <file path=customXml/item3.xml><?xml version="1.0" encoding="utf-8"?>
@@ -15771,14 +17865,6 @@
 </file>
 
 <file path=customXml/itemProps1.xml><?xml version="1.0" encoding="utf-8"?>
-<ds:datastoreItem xmlns:ds="http://schemas.openxmlformats.org/officeDocument/2006/customXml" ds:itemID="{3836F65B-1B07-41EE-A0E8-BC6EF3855225}">
-  <ds:schemaRefs>
-    <ds:schemaRef ds:uri="http://schemas.microsoft.com/sharepoint/v3/contenttype/forms"/>
-  </ds:schemaRefs>
-</ds:datastoreItem>
-</file>
-
-<file path=customXml/itemProps2.xml><?xml version="1.0" encoding="utf-8"?>
 <ds:datastoreItem xmlns:ds="http://schemas.openxmlformats.org/officeDocument/2006/customXml" ds:itemID="{60C67BEE-D13F-4BD2-98A5-34D8A0977F68}">
   <ds:schemaRefs>
     <ds:schemaRef ds:uri="4873beb7-5857-4685-be1f-d57550cc96cc"/>
@@ -15790,6 +17876,14 @@
     <ds:schemaRef ds:uri="http://schemas.microsoft.com/office/infopath/2007/PartnerControls"/>
     <ds:schemaRef ds:uri="http://www.w3.org/XML/1998/namespace"/>
     <ds:schemaRef ds:uri="http://purl.org/dc/dcmitype/"/>
+  </ds:schemaRefs>
+</ds:datastoreItem>
+</file>
+
+<file path=customXml/itemProps2.xml><?xml version="1.0" encoding="utf-8"?>
+<ds:datastoreItem xmlns:ds="http://schemas.openxmlformats.org/officeDocument/2006/customXml" ds:itemID="{3836F65B-1B07-41EE-A0E8-BC6EF3855225}">
+  <ds:schemaRefs>
+    <ds:schemaRef ds:uri="http://schemas.microsoft.com/sharepoint/v3/contenttype/forms"/>
   </ds:schemaRefs>
 </ds:datastoreItem>
 </file>
